--- a/lectures/lec10_mem.pptx
+++ b/lectures/lec10_mem.pptx
@@ -280,7 +280,7 @@
           <a:p>
             <a:fld id="{050F0499-AE52-4672-879B-3107B2FC2A9F}" type="datetimeFigureOut">
               <a:rPr lang="ko-KR" altLang="en-US" smtClean="0"/>
-              <a:t>2024. 10. 23.</a:t>
+              <a:t>2026. 2. 11.</a:t>
             </a:fld>
             <a:endParaRPr lang="ko-KR" altLang="en-US"/>
           </a:p>
@@ -12007,6 +12007,154 @@
           </a:p>
         </p:txBody>
       </p:sp>
+      <p:sp>
+        <p:nvSpPr>
+          <p:cNvPr id="26" name="TextBox 25">
+            <a:extLst>
+              <a:ext uri="{FF2B5EF4-FFF2-40B4-BE49-F238E27FC236}">
+                <a16:creationId xmlns:a16="http://schemas.microsoft.com/office/drawing/2014/main" id="{510EAF3E-941E-200A-9E47-102313CDE683}"/>
+              </a:ext>
+            </a:extLst>
+          </p:cNvPr>
+          <p:cNvSpPr txBox="1"/>
+          <p:nvPr/>
+        </p:nvSpPr>
+        <p:spPr>
+          <a:xfrm>
+            <a:off x="7054658" y="2613799"/>
+            <a:ext cx="936104" cy="369332"/>
+          </a:xfrm>
+          <a:prstGeom prst="rect">
+            <a:avLst/>
+          </a:prstGeom>
+          <a:noFill/>
+        </p:spPr>
+        <p:txBody>
+          <a:bodyPr wrap="square">
+            <a:spAutoFit/>
+          </a:bodyPr>
+          <a:lstStyle/>
+          <a:p>
+            <a:r>
+              <a:rPr lang="en-US" altLang="ko-KR" sz="1800" dirty="0">
+                <a:solidFill>
+                  <a:srgbClr val="FF0000"/>
+                </a:solidFill>
+                <a:highlight>
+                  <a:srgbClr val="FFFF00"/>
+                </a:highlight>
+                <a:latin typeface="Courier New" charset="0"/>
+                <a:ea typeface="Courier New" charset="0"/>
+                <a:cs typeface="Courier New" charset="0"/>
+              </a:rPr>
+              <a:t>break</a:t>
+            </a:r>
+            <a:endParaRPr lang="en-US" dirty="0">
+              <a:solidFill>
+                <a:srgbClr val="FF0000"/>
+              </a:solidFill>
+              <a:highlight>
+                <a:srgbClr val="FFFF00"/>
+              </a:highlight>
+            </a:endParaRPr>
+          </a:p>
+        </p:txBody>
+      </p:sp>
+      <p:cxnSp>
+        <p:nvCxnSpPr>
+          <p:cNvPr id="27" name="직선 화살표 연결선 90">
+            <a:extLst>
+              <a:ext uri="{FF2B5EF4-FFF2-40B4-BE49-F238E27FC236}">
+                <a16:creationId xmlns:a16="http://schemas.microsoft.com/office/drawing/2014/main" id="{98E461A0-F866-7534-30E1-8CADA2302384}"/>
+              </a:ext>
+            </a:extLst>
+          </p:cNvPr>
+          <p:cNvCxnSpPr>
+            <a:cxnSpLocks/>
+            <a:stCxn id="26" idx="1"/>
+            <a:endCxn id="19" idx="2"/>
+          </p:cNvCxnSpPr>
+          <p:nvPr/>
+        </p:nvCxnSpPr>
+        <p:spPr>
+          <a:xfrm flipH="1">
+            <a:off x="6195408" y="2798465"/>
+            <a:ext cx="859250" cy="297524"/>
+          </a:xfrm>
+          <a:prstGeom prst="straightConnector1">
+            <a:avLst/>
+          </a:prstGeom>
+          <a:ln w="12700">
+            <a:solidFill>
+              <a:schemeClr val="tx1"/>
+            </a:solidFill>
+            <a:tailEnd type="stealth" w="lg" len="lg"/>
+          </a:ln>
+        </p:spPr>
+        <p:style>
+          <a:lnRef idx="1">
+            <a:schemeClr val="accent1"/>
+          </a:lnRef>
+          <a:fillRef idx="0">
+            <a:schemeClr val="accent1"/>
+          </a:fillRef>
+          <a:effectRef idx="0">
+            <a:schemeClr val="accent1"/>
+          </a:effectRef>
+          <a:fontRef idx="minor">
+            <a:schemeClr val="tx1"/>
+          </a:fontRef>
+        </p:style>
+      </p:cxnSp>
+      <p:sp>
+        <p:nvSpPr>
+          <p:cNvPr id="31" name="TextBox 30">
+            <a:extLst>
+              <a:ext uri="{FF2B5EF4-FFF2-40B4-BE49-F238E27FC236}">
+                <a16:creationId xmlns:a16="http://schemas.microsoft.com/office/drawing/2014/main" id="{561CA2DA-B31F-E115-BEBE-9140848D5C1E}"/>
+              </a:ext>
+            </a:extLst>
+          </p:cNvPr>
+          <p:cNvSpPr txBox="1"/>
+          <p:nvPr/>
+        </p:nvSpPr>
+        <p:spPr>
+          <a:xfrm>
+            <a:off x="4820784" y="32166"/>
+            <a:ext cx="4267671" cy="584775"/>
+          </a:xfrm>
+          <a:prstGeom prst="rect">
+            <a:avLst/>
+          </a:prstGeom>
+          <a:noFill/>
+        </p:spPr>
+        <p:txBody>
+          <a:bodyPr wrap="square">
+            <a:spAutoFit/>
+          </a:bodyPr>
+          <a:lstStyle/>
+          <a:p>
+            <a:r>
+              <a:rPr lang="en-US" sz="1600" i="1" dirty="0">
+                <a:highlight>
+                  <a:srgbClr val="C0C0C0"/>
+                </a:highlight>
+                <a:latin typeface="Arial" panose="020B0604020202020204" pitchFamily="34" charset="0"/>
+                <a:cs typeface="Arial" panose="020B0604020202020204" pitchFamily="34" charset="0"/>
+                <a:hlinkClick r:id="rId2"/>
+              </a:rPr>
+              <a:t>https://stackoverflow.com/questions/6988487/what-does-the-brk-system-call-do</a:t>
+            </a:r>
+            <a:endParaRPr lang="en-US" sz="1600" i="1" dirty="0">
+              <a:highlight>
+                <a:srgbClr val="C0C0C0"/>
+              </a:highlight>
+              <a:latin typeface="Arial" panose="020B0604020202020204" pitchFamily="34" charset="0"/>
+              <a:cs typeface="Arial" panose="020B0604020202020204" pitchFamily="34" charset="0"/>
+            </a:endParaRPr>
+          </a:p>
+        </p:txBody>
+      </p:sp>
     </p:spTree>
     <p:extLst>
       <p:ext uri="{BB962C8B-B14F-4D97-AF65-F5344CB8AC3E}">
@@ -19063,8 +19211,8 @@
           </a:p>
         </p:txBody>
       </p:sp>
-      <mc:AlternateContent xmlns:mc="http://schemas.openxmlformats.org/markup-compatibility/2006" xmlns:a14="http://schemas.microsoft.com/office/drawing/2010/main">
-        <mc:Choice Requires="a14">
+      <mc:AlternateContent xmlns:mc="http://schemas.openxmlformats.org/markup-compatibility/2006">
+        <mc:Choice xmlns:a14="http://schemas.microsoft.com/office/drawing/2010/main" Requires="a14">
           <p:sp>
             <p:nvSpPr>
               <p:cNvPr id="6" name="모서리가 둥근 직사각형 5"/>
@@ -19129,7 +19277,29 @@
                           <a:ea typeface="맑은 고딕" pitchFamily="50" charset="-127"/>
                           <a:cs typeface="Courier New" pitchFamily="49" charset="0"/>
                         </a:rPr>
-                        <m:t>𝑝h𝑦𝑐𝑎𝑙</m:t>
+                        <m:t>𝑝h𝑦</m:t>
+                      </m:r>
+                      <m:r>
+                        <a:rPr lang="en-US" altLang="zh-CN" b="0" i="1" smtClean="0">
+                          <a:solidFill>
+                            <a:srgbClr val="4F81BD"/>
+                          </a:solidFill>
+                          <a:latin typeface="Cambria Math" panose="02040503050406030204" pitchFamily="18" charset="0"/>
+                          <a:ea typeface="맑은 고딕" pitchFamily="50" charset="-127"/>
+                          <a:cs typeface="Courier New" pitchFamily="49" charset="0"/>
+                        </a:rPr>
+                        <m:t>𝑠𝑖</m:t>
+                      </m:r>
+                      <m:r>
+                        <a:rPr lang="en-US" altLang="ko-KR" i="1" smtClean="0">
+                          <a:solidFill>
+                            <a:srgbClr val="4F81BD"/>
+                          </a:solidFill>
+                          <a:latin typeface="Cambria Math"/>
+                          <a:ea typeface="맑은 고딕" pitchFamily="50" charset="-127"/>
+                          <a:cs typeface="Courier New" pitchFamily="49" charset="0"/>
+                        </a:rPr>
+                        <m:t>𝑐𝑎𝑙</m:t>
                       </m:r>
                       <m:r>
                         <a:rPr lang="en-US" altLang="ko-KR" i="1" smtClean="0">
@@ -19234,7 +19404,7 @@
             </p:txBody>
           </p:sp>
         </mc:Choice>
-        <mc:Fallback xmlns="">
+        <mc:Fallback>
           <p:sp>
             <p:nvSpPr>
               <p:cNvPr id="6" name="모서리가 둥근 직사각형 5"/>
@@ -19251,7 +19421,7 @@
               <a:prstGeom prst="roundRect">
                 <a:avLst/>
               </a:prstGeom>
-              <a:blipFill rotWithShape="1">
+              <a:blipFill>
                 <a:blip r:embed="rId2"/>
                 <a:stretch>
                   <a:fillRect/>
@@ -19273,7 +19443,7 @@
               <a:lstStyle/>
               <a:p>
                 <a:r>
-                  <a:rPr lang="ko-KR" altLang="en-US">
+                  <a:rPr lang="en-US">
                     <a:noFill/>
                   </a:rPr>
                   <a:t> </a:t>
@@ -24270,11 +24440,19 @@
           <a:p>
             <a:r>
               <a:rPr lang="en-US" altLang="ko-KR" dirty="0"/>
-              <a:t>The OS must </a:t>
+              <a:t>The OS </a:t>
+            </a:r>
+            <a:r>
+              <a:rPr lang="en-US" altLang="ko-KR"/>
+              <a:t>must </a:t>
+            </a:r>
+            <a:r>
+              <a:rPr lang="en-US" altLang="ko-KR" b="1"/>
+              <a:t>find </a:t>
             </a:r>
             <a:r>
               <a:rPr lang="en-US" altLang="ko-KR" b="1" dirty="0"/>
-              <a:t>find a room</a:t>
+              <a:t>room</a:t>
             </a:r>
             <a:r>
               <a:rPr lang="en-US" altLang="ko-KR" dirty="0"/>
@@ -50496,7 +50674,7 @@
                 <a:ea typeface="맑은 고딕" pitchFamily="50" charset="-127"/>
                 <a:cs typeface="Courier New" pitchFamily="49" charset="0"/>
               </a:rPr>
-              <a:t>4</a:t>
+              <a:t>8</a:t>
             </a:r>
           </a:p>
         </p:txBody>
@@ -50891,6 +51069,80 @@
               </a:rPr>
               <a:t>40</a:t>
             </a:r>
+          </a:p>
+        </p:txBody>
+      </p:sp>
+      <p:sp>
+        <p:nvSpPr>
+          <p:cNvPr id="11" name="TextBox 10">
+            <a:extLst>
+              <a:ext uri="{FF2B5EF4-FFF2-40B4-BE49-F238E27FC236}">
+                <a16:creationId xmlns:a16="http://schemas.microsoft.com/office/drawing/2014/main" id="{E666D4ED-AC5A-A908-6503-DC3FDFB13E3C}"/>
+              </a:ext>
+            </a:extLst>
+          </p:cNvPr>
+          <p:cNvSpPr txBox="1"/>
+          <p:nvPr/>
+        </p:nvSpPr>
+        <p:spPr>
+          <a:xfrm>
+            <a:off x="6612553" y="3655477"/>
+            <a:ext cx="1545733" cy="369332"/>
+          </a:xfrm>
+          <a:prstGeom prst="rect">
+            <a:avLst/>
+          </a:prstGeom>
+          <a:noFill/>
+        </p:spPr>
+        <p:txBody>
+          <a:bodyPr wrap="square">
+            <a:spAutoFit/>
+          </a:bodyPr>
+          <a:lstStyle/>
+          <a:p>
+            <a:r>
+              <a:rPr lang="en-US" altLang="zh-CN" dirty="0">
+                <a:solidFill>
+                  <a:schemeClr val="accent6">
+                    <a:lumMod val="75000"/>
+                  </a:schemeClr>
+                </a:solidFill>
+                <a:latin typeface="Malgun Gothic" panose="020B0503020000020004" pitchFamily="34" charset="-127"/>
+                <a:ea typeface="Malgun Gothic" panose="020B0503020000020004" pitchFamily="34" charset="-127"/>
+                <a:cs typeface="Courier New" pitchFamily="49" charset="0"/>
+              </a:rPr>
+              <a:t>64-bit</a:t>
+            </a:r>
+            <a:r>
+              <a:rPr lang="zh-CN" altLang="en-US" dirty="0">
+                <a:solidFill>
+                  <a:schemeClr val="accent6">
+                    <a:lumMod val="75000"/>
+                  </a:schemeClr>
+                </a:solidFill>
+                <a:latin typeface="Malgun Gothic" panose="020B0503020000020004" pitchFamily="34" charset="-127"/>
+                <a:ea typeface="Malgun Gothic" panose="020B0503020000020004" pitchFamily="34" charset="-127"/>
+                <a:cs typeface="Courier New" pitchFamily="49" charset="0"/>
+              </a:rPr>
+              <a:t> </a:t>
+            </a:r>
+            <a:r>
+              <a:rPr lang="en-US" altLang="zh-CN" dirty="0">
+                <a:solidFill>
+                  <a:schemeClr val="accent6">
+                    <a:lumMod val="75000"/>
+                  </a:schemeClr>
+                </a:solidFill>
+                <a:latin typeface="Malgun Gothic" panose="020B0503020000020004" pitchFamily="34" charset="-127"/>
+                <a:ea typeface="Malgun Gothic" panose="020B0503020000020004" pitchFamily="34" charset="-127"/>
+                <a:cs typeface="Courier New" pitchFamily="49" charset="0"/>
+              </a:rPr>
+              <a:t>arch</a:t>
+            </a:r>
+            <a:endParaRPr lang="en-US" dirty="0">
+              <a:latin typeface="Malgun Gothic" panose="020B0503020000020004" pitchFamily="34" charset="-127"/>
+              <a:ea typeface="Malgun Gothic" panose="020B0503020000020004" pitchFamily="34" charset="-127"/>
+            </a:endParaRPr>
           </a:p>
         </p:txBody>
       </p:sp>

--- a/lectures/lec10_mem.pptx
+++ b/lectures/lec10_mem.pptx
@@ -6,7 +6,7 @@
     <p:sldMasterId id="2147483686" r:id="rId2"/>
   </p:sldMasterIdLst>
   <p:notesMasterIdLst>
-    <p:notesMasterId r:id="rId45"/>
+    <p:notesMasterId r:id="rId44"/>
   </p:notesMasterIdLst>
   <p:sldIdLst>
     <p:sldId id="2991" r:id="rId3"/>
@@ -50,7 +50,6 @@
     <p:sldId id="2782" r:id="rId41"/>
     <p:sldId id="2783" r:id="rId42"/>
     <p:sldId id="2971" r:id="rId43"/>
-    <p:sldId id="2970" r:id="rId44"/>
   </p:sldIdLst>
   <p:sldSz cx="9144000" cy="6858000" type="screen4x3"/>
   <p:notesSz cx="6797675" cy="9928225"/>
@@ -280,7 +279,7 @@
           <a:p>
             <a:fld id="{050F0499-AE52-4672-879B-3107B2FC2A9F}" type="datetimeFigureOut">
               <a:rPr lang="ko-KR" altLang="en-US" smtClean="0"/>
-              <a:t>2026. 2. 11.</a:t>
+              <a:t>2026. 2. 25.</a:t>
             </a:fld>
             <a:endParaRPr lang="ko-KR" altLang="en-US"/>
           </a:p>
@@ -19211,8 +19210,8 @@
           </a:p>
         </p:txBody>
       </p:sp>
-      <mc:AlternateContent xmlns:mc="http://schemas.openxmlformats.org/markup-compatibility/2006">
-        <mc:Choice xmlns:a14="http://schemas.microsoft.com/office/drawing/2010/main" Requires="a14">
+      <mc:AlternateContent xmlns:mc="http://schemas.openxmlformats.org/markup-compatibility/2006" xmlns:a14="http://schemas.microsoft.com/office/drawing/2010/main">
+        <mc:Choice Requires="a14">
           <p:sp>
             <p:nvSpPr>
               <p:cNvPr id="6" name="모서리가 둥근 직사각형 5"/>
@@ -19404,7 +19403,7 @@
             </p:txBody>
           </p:sp>
         </mc:Choice>
-        <mc:Fallback>
+        <mc:Fallback xmlns="">
           <p:sp>
             <p:nvSpPr>
               <p:cNvPr id="6" name="모서리가 둥근 직사각형 5"/>
@@ -46760,224 +46759,6 @@
 </p:sld>
 </file>
 
-<file path=ppt/slides/slide42.xml><?xml version="1.0" encoding="utf-8"?>
-<p:sld xmlns:a="http://schemas.openxmlformats.org/drawingml/2006/main" xmlns:r="http://schemas.openxmlformats.org/officeDocument/2006/relationships" xmlns:p="http://schemas.openxmlformats.org/presentationml/2006/main" show="0">
-  <p:cSld>
-    <p:spTree>
-      <p:nvGrpSpPr>
-        <p:cNvPr id="1" name=""/>
-        <p:cNvGrpSpPr/>
-        <p:nvPr/>
-      </p:nvGrpSpPr>
-      <p:grpSpPr>
-        <a:xfrm>
-          <a:off x="0" y="0"/>
-          <a:ext cx="0" cy="0"/>
-          <a:chOff x="0" y="0"/>
-          <a:chExt cx="0" cy="0"/>
-        </a:xfrm>
-      </p:grpSpPr>
-      <p:sp>
-        <p:nvSpPr>
-          <p:cNvPr id="2" name="Title 1"/>
-          <p:cNvSpPr>
-            <a:spLocks noGrp="1"/>
-          </p:cNvSpPr>
-          <p:nvPr>
-            <p:ph type="title"/>
-          </p:nvPr>
-        </p:nvSpPr>
-        <p:spPr/>
-        <p:txBody>
-          <a:bodyPr/>
-          <a:lstStyle/>
-          <a:p>
-            <a:r>
-              <a:rPr lang="en-US" dirty="0"/>
-              <a:t>History of segmentation</a:t>
-            </a:r>
-          </a:p>
-        </p:txBody>
-      </p:sp>
-      <p:sp>
-        <p:nvSpPr>
-          <p:cNvPr id="3" name="Content Placeholder 2"/>
-          <p:cNvSpPr>
-            <a:spLocks noGrp="1"/>
-          </p:cNvSpPr>
-          <p:nvPr>
-            <p:ph idx="1"/>
-          </p:nvPr>
-        </p:nvSpPr>
-        <p:spPr/>
-        <p:txBody>
-          <a:bodyPr/>
-          <a:lstStyle/>
-          <a:p>
-            <a:r>
-              <a:rPr lang="en-US" dirty="0"/>
-              <a:t>In </a:t>
-            </a:r>
-            <a:r>
-              <a:rPr lang="en-US" altLang="zh-CN" dirty="0"/>
-              <a:t>the</a:t>
-            </a:r>
-            <a:r>
-              <a:rPr lang="zh-CN" altLang="en-US" dirty="0"/>
-              <a:t> </a:t>
-            </a:r>
-            <a:r>
-              <a:rPr lang="en-US" dirty="0"/>
-              <a:t>early days, OS used segmentation</a:t>
-            </a:r>
-          </a:p>
-          <a:p>
-            <a:pPr lvl="1"/>
-            <a:r>
-              <a:rPr lang="en-US" dirty="0"/>
-              <a:t>Burroughs B5000 (first commercial machine with virtual memory)</a:t>
-            </a:r>
-          </a:p>
-          <a:p>
-            <a:pPr lvl="1"/>
-            <a:r>
-              <a:rPr lang="en-US" dirty="0"/>
-              <a:t>IBM AS/400</a:t>
-            </a:r>
-          </a:p>
-          <a:p>
-            <a:pPr lvl="1"/>
-            <a:r>
-              <a:rPr lang="en-US" dirty="0"/>
-              <a:t>Intel 8086, 80286</a:t>
-            </a:r>
-          </a:p>
-          <a:p>
-            <a:r>
-              <a:rPr lang="en-US" dirty="0"/>
-              <a:t>80386 and later Intel CPUs support paging</a:t>
-            </a:r>
-          </a:p>
-          <a:p>
-            <a:r>
-              <a:rPr lang="en-US" dirty="0"/>
-              <a:t>X86-64 does not use segmentation any more in 64</a:t>
-            </a:r>
-            <a:r>
-              <a:rPr lang="en-US" altLang="zh-CN" dirty="0"/>
-              <a:t>-</a:t>
-            </a:r>
-            <a:r>
-              <a:rPr lang="en-US" dirty="0"/>
-              <a:t>bit mode</a:t>
-            </a:r>
-          </a:p>
-          <a:p>
-            <a:pPr lvl="1"/>
-            <a:r>
-              <a:rPr lang="en-US" dirty="0"/>
-              <a:t>CS,SS,DS and ES are forced to 0 and 2^24 </a:t>
-            </a:r>
-          </a:p>
-        </p:txBody>
-      </p:sp>
-      <p:sp>
-        <p:nvSpPr>
-          <p:cNvPr id="4" name="Slide Number Placeholder 3"/>
-          <p:cNvSpPr>
-            <a:spLocks noGrp="1"/>
-          </p:cNvSpPr>
-          <p:nvPr>
-            <p:ph type="sldNum" sz="quarter" idx="11"/>
-          </p:nvPr>
-        </p:nvSpPr>
-        <p:spPr/>
-        <p:txBody>
-          <a:bodyPr/>
-          <a:lstStyle/>
-          <a:p>
-            <a:pPr>
-              <a:defRPr/>
-            </a:pPr>
-            <a:fld id="{515CC4ED-1449-4712-AE45-EBC263B4DD26}" type="slidenum">
-              <a:rPr lang="en-US" altLang="ko-KR" smtClean="0">
-                <a:solidFill>
-                  <a:srgbClr val="1F497D">
-                    <a:lumMod val="50000"/>
-                  </a:srgbClr>
-                </a:solidFill>
-              </a:rPr>
-              <a:pPr>
-                <a:defRPr/>
-              </a:pPr>
-              <a:t>42</a:t>
-            </a:fld>
-            <a:r>
-              <a:rPr lang="en-US" altLang="ko-KR">
-                <a:solidFill>
-                  <a:srgbClr val="1F497D">
-                    <a:lumMod val="50000"/>
-                  </a:srgbClr>
-                </a:solidFill>
-              </a:rPr>
-              <a:t> </a:t>
-            </a:r>
-          </a:p>
-        </p:txBody>
-      </p:sp>
-      <p:sp>
-        <p:nvSpPr>
-          <p:cNvPr id="5" name="Footer Placeholder 4"/>
-          <p:cNvSpPr>
-            <a:spLocks noGrp="1"/>
-          </p:cNvSpPr>
-          <p:nvPr>
-            <p:ph type="ftr" sz="quarter" idx="3"/>
-          </p:nvPr>
-        </p:nvSpPr>
-        <p:spPr/>
-        <p:txBody>
-          <a:bodyPr/>
-          <a:lstStyle/>
-          <a:p>
-            <a:pPr fontAlgn="base">
-              <a:spcBef>
-                <a:spcPct val="0"/>
-              </a:spcBef>
-              <a:spcAft>
-                <a:spcPct val="0"/>
-              </a:spcAft>
-              <a:defRPr/>
-            </a:pPr>
-            <a:r>
-              <a:rPr kumimoji="1" lang="en-US" altLang="ko-KR">
-                <a:solidFill>
-                  <a:prstClr val="black"/>
-                </a:solidFill>
-              </a:rPr>
-              <a:t>CSCI 3150 Intro to OS</a:t>
-            </a:r>
-            <a:endParaRPr kumimoji="1" lang="ko-KR" altLang="en-US" dirty="0">
-              <a:solidFill>
-                <a:prstClr val="black"/>
-              </a:solidFill>
-            </a:endParaRPr>
-          </a:p>
-        </p:txBody>
-      </p:sp>
-    </p:spTree>
-    <p:extLst>
-      <p:ext uri="{BB962C8B-B14F-4D97-AF65-F5344CB8AC3E}">
-        <p14:creationId xmlns:p14="http://schemas.microsoft.com/office/powerpoint/2010/main" val="830416708"/>
-      </p:ext>
-    </p:extLst>
-  </p:cSld>
-  <p:clrMapOvr>
-    <a:masterClrMapping/>
-  </p:clrMapOvr>
-</p:sld>
-</file>
-
 <file path=ppt/slides/slide5.xml><?xml version="1.0" encoding="utf-8"?>
 <p:sld xmlns:a="http://schemas.openxmlformats.org/drawingml/2006/main" xmlns:r="http://schemas.openxmlformats.org/officeDocument/2006/relationships" xmlns:p="http://schemas.openxmlformats.org/presentationml/2006/main">
   <p:cSld>
